--- a/src/main/resources/templates/projectreferences/project_template_en.pptx
+++ b/src/main/resources/templates/projectreferences/project_template_en.pptx
@@ -247,7 +247,7 @@
           <a:p>
             <a:fld id="{C3440642-083C-45F1-96AE-6C40D1428CD6}" type="datetimeFigureOut">
               <a:rPr lang="en-GB" smtClean="0"/>
-              <a:t>16/04/2025</a:t>
+              <a:t>15/05/2025</a:t>
             </a:fld>
             <a:endParaRPr lang="en-GB"/>
           </a:p>
@@ -424,7 +424,7 @@
           <a:p>
             <a:fld id="{DEE2F1A5-1147-44AA-941C-401C9E3002E6}" type="datetimeFigureOut">
               <a:rPr lang="en-US" smtClean="0"/>
-              <a:t>4/16/2025</a:t>
+              <a:t>5/15/25</a:t>
             </a:fld>
             <a:endParaRPr lang="en-US"/>
           </a:p>
@@ -2977,7 +2977,7 @@
       </p:sp>
       <p:sp>
         <p:nvSpPr>
-          <p:cNvPr id="6" name="DiamondText">
+          <p:cNvPr id="6" name="ValueAdded0">
             <a:extLst>
               <a:ext uri="{FF2B5EF4-FFF2-40B4-BE49-F238E27FC236}">
                 <a16:creationId xmlns:a16="http://schemas.microsoft.com/office/drawing/2014/main" id="{8D64AFEB-3E04-C7FB-AF73-F54099626C1E}"/>
@@ -3008,7 +3008,7 @@
       </p:sp>
       <p:sp>
         <p:nvSpPr>
-          <p:cNvPr id="7" name="GraphText">
+          <p:cNvPr id="7" name="ValueAdded2">
             <a:extLst>
               <a:ext uri="{FF2B5EF4-FFF2-40B4-BE49-F238E27FC236}">
                 <a16:creationId xmlns:a16="http://schemas.microsoft.com/office/drawing/2014/main" id="{0D5685A2-8B59-9D20-79FB-7EC620618F70}"/>
@@ -3039,7 +3039,7 @@
       </p:sp>
       <p:sp>
         <p:nvSpPr>
-          <p:cNvPr id="8" name="MoneyText">
+          <p:cNvPr id="8" name="ValueAdded1">
             <a:extLst>
               <a:ext uri="{FF2B5EF4-FFF2-40B4-BE49-F238E27FC236}">
                 <a16:creationId xmlns:a16="http://schemas.microsoft.com/office/drawing/2014/main" id="{C895571B-A082-2DED-8856-BFD31CCA299C}"/>
@@ -3178,1991 +3178,12 @@
           </a:p>
         </p:txBody>
       </p:sp>
-      <p:grpSp>
-        <p:nvGrpSpPr>
-          <p:cNvPr id="12" name="Gruppieren 11">
-            <a:extLst>
-              <a:ext uri="{FF2B5EF4-FFF2-40B4-BE49-F238E27FC236}">
-                <a16:creationId xmlns:a16="http://schemas.microsoft.com/office/drawing/2014/main" id="{646D0B21-F8C2-BDCB-2A9C-451509114C37}"/>
-              </a:ext>
-            </a:extLst>
-          </p:cNvPr>
-          <p:cNvGrpSpPr/>
-          <p:nvPr/>
-        </p:nvGrpSpPr>
-        <p:grpSpPr>
-          <a:xfrm>
-            <a:off x="693829" y="2198802"/>
-            <a:ext cx="3476940" cy="1012509"/>
-            <a:chOff x="6507861" y="2561583"/>
-            <a:chExt cx="5162131" cy="1232316"/>
-          </a:xfrm>
-        </p:grpSpPr>
-        <p:grpSp>
-          <p:nvGrpSpPr>
-            <p:cNvPr id="13" name="Gruppieren 12">
-              <a:extLst>
-                <a:ext uri="{FF2B5EF4-FFF2-40B4-BE49-F238E27FC236}">
-                  <a16:creationId xmlns:a16="http://schemas.microsoft.com/office/drawing/2014/main" id="{CFE9309D-4FCB-9BAA-B1F7-BA9C215779D8}"/>
-                </a:ext>
-              </a:extLst>
-            </p:cNvPr>
-            <p:cNvGrpSpPr/>
-            <p:nvPr/>
-          </p:nvGrpSpPr>
-          <p:grpSpPr>
-            <a:xfrm>
-              <a:off x="6846863" y="2831951"/>
-              <a:ext cx="4823129" cy="885655"/>
-              <a:chOff x="6846863" y="2831951"/>
-              <a:chExt cx="4823129" cy="885655"/>
-            </a:xfrm>
-          </p:grpSpPr>
-          <p:grpSp>
-            <p:nvGrpSpPr>
-              <p:cNvPr id="15" name="Group 66">
-                <a:extLst>
-                  <a:ext uri="{FF2B5EF4-FFF2-40B4-BE49-F238E27FC236}">
-                    <a16:creationId xmlns:a16="http://schemas.microsoft.com/office/drawing/2014/main" id="{EB4A2B0C-BCEA-E324-D682-AE2F44D592CE}"/>
-                  </a:ext>
-                </a:extLst>
-              </p:cNvPr>
-              <p:cNvGrpSpPr>
-                <a:grpSpLocks noChangeAspect="1"/>
-              </p:cNvGrpSpPr>
-              <p:nvPr/>
-            </p:nvGrpSpPr>
-            <p:grpSpPr>
-              <a:xfrm>
-                <a:off x="6846863" y="2831951"/>
-                <a:ext cx="4333592" cy="729400"/>
-                <a:chOff x="6262914" y="2951964"/>
-                <a:chExt cx="3860801" cy="629669"/>
-              </a:xfrm>
-              <a:solidFill>
-                <a:schemeClr val="tx2">
-                  <a:lumMod val="20000"/>
-                  <a:lumOff val="80000"/>
-                </a:schemeClr>
-              </a:solidFill>
-            </p:grpSpPr>
-            <p:grpSp>
-              <p:nvGrpSpPr>
-                <p:cNvPr id="17" name="Group 71">
-                  <a:extLst>
-                    <a:ext uri="{FF2B5EF4-FFF2-40B4-BE49-F238E27FC236}">
-                      <a16:creationId xmlns:a16="http://schemas.microsoft.com/office/drawing/2014/main" id="{E46B5A67-50F8-A557-F145-319647ECB771}"/>
-                    </a:ext>
-                  </a:extLst>
-                </p:cNvPr>
-                <p:cNvGrpSpPr/>
-                <p:nvPr/>
-              </p:nvGrpSpPr>
-              <p:grpSpPr>
-                <a:xfrm>
-                  <a:off x="6262914" y="3429000"/>
-                  <a:ext cx="3860801" cy="152633"/>
-                  <a:chOff x="6262914" y="3429000"/>
-                  <a:chExt cx="3860801" cy="152633"/>
-                </a:xfrm>
-                <a:grpFill/>
-              </p:grpSpPr>
-              <p:sp>
-                <p:nvSpPr>
-                  <p:cNvPr id="33" name="Rectangle 93">
-                    <a:extLst>
-                      <a:ext uri="{FF2B5EF4-FFF2-40B4-BE49-F238E27FC236}">
-                        <a16:creationId xmlns:a16="http://schemas.microsoft.com/office/drawing/2014/main" id="{41B96CE8-6E70-A988-66E5-1A6F032A9C91}"/>
-                      </a:ext>
-                    </a:extLst>
-                  </p:cNvPr>
-                  <p:cNvSpPr/>
-                  <p:nvPr/>
-                </p:nvSpPr>
-                <p:spPr>
-                  <a:xfrm>
-                    <a:off x="6262914" y="3429000"/>
-                    <a:ext cx="478972" cy="152633"/>
-                  </a:xfrm>
-                  <a:prstGeom prst="rect">
-                    <a:avLst/>
-                  </a:prstGeom>
-                  <a:grpFill/>
-                  <a:ln w="12700" cap="flat" cmpd="sng" algn="ctr">
-                    <a:solidFill>
-                      <a:schemeClr val="bg1">
-                        <a:lumMod val="75000"/>
-                      </a:schemeClr>
-                    </a:solidFill>
-                    <a:prstDash val="solid"/>
-                    <a:miter lim="800000"/>
-                  </a:ln>
-                  <a:effectLst/>
-                </p:spPr>
-                <p:txBody>
-                  <a:bodyPr rtlCol="0" anchor="ctr"/>
-                  <a:lstStyle/>
-                  <a:p>
-                    <a:pPr marL="0" marR="0" lvl="0" indent="0" algn="ctr" defTabSz="914400" eaLnBrk="1" fontAlgn="auto" latinLnBrk="0" hangingPunct="1">
-                      <a:lnSpc>
-                        <a:spcPct val="100000"/>
-                      </a:lnSpc>
-                      <a:spcBef>
-                        <a:spcPts val="0"/>
-                      </a:spcBef>
-                      <a:spcAft>
-                        <a:spcPts val="0"/>
-                      </a:spcAft>
-                      <a:buClrTx/>
-                      <a:buSzTx/>
-                      <a:buFontTx/>
-                      <a:buNone/>
-                      <a:tabLst/>
-                      <a:defRPr/>
-                    </a:pPr>
-                    <a:r>
-                      <a:rPr kumimoji="0" lang="en-GB" sz="400" b="0" i="0" u="none" strike="noStrike" kern="0" cap="none" spc="0" normalizeH="0" baseline="0">
-                        <a:ln>
-                          <a:noFill/>
-                        </a:ln>
-                        <a:solidFill>
-                          <a:schemeClr val="accent2"/>
-                        </a:solidFill>
-                        <a:effectLst/>
-                        <a:uLnTx/>
-                        <a:uFillTx/>
-                        <a:latin typeface="Montserrat Light"/>
-                        <a:ea typeface="+mn-ea"/>
-                        <a:cs typeface="Arial" panose="020B0604020202020204" pitchFamily="34" charset="0"/>
-                      </a:rPr>
-                      <a:t>Awareness</a:t>
-                    </a:r>
-                  </a:p>
-                </p:txBody>
-              </p:sp>
-              <p:sp>
-                <p:nvSpPr>
-                  <p:cNvPr id="34" name="Rectangle 94">
-                    <a:extLst>
-                      <a:ext uri="{FF2B5EF4-FFF2-40B4-BE49-F238E27FC236}">
-                        <a16:creationId xmlns:a16="http://schemas.microsoft.com/office/drawing/2014/main" id="{C400D1EF-04E8-1019-2D29-C72F4E24D862}"/>
-                      </a:ext>
-                    </a:extLst>
-                  </p:cNvPr>
-                  <p:cNvSpPr/>
-                  <p:nvPr/>
-                </p:nvSpPr>
-                <p:spPr>
-                  <a:xfrm>
-                    <a:off x="6746032" y="3429000"/>
-                    <a:ext cx="478972" cy="152633"/>
-                  </a:xfrm>
-                  <a:prstGeom prst="rect">
-                    <a:avLst/>
-                  </a:prstGeom>
-                  <a:grpFill/>
-                  <a:ln w="12700" cap="flat" cmpd="sng" algn="ctr">
-                    <a:solidFill>
-                      <a:schemeClr val="bg1">
-                        <a:lumMod val="75000"/>
-                      </a:schemeClr>
-                    </a:solidFill>
-                    <a:prstDash val="solid"/>
-                    <a:miter lim="800000"/>
-                  </a:ln>
-                  <a:effectLst/>
-                </p:spPr>
-                <p:txBody>
-                  <a:bodyPr rtlCol="0" anchor="ctr"/>
-                  <a:lstStyle/>
-                  <a:p>
-                    <a:pPr marL="0" marR="0" lvl="0" indent="0" algn="ctr" defTabSz="914400" eaLnBrk="1" fontAlgn="auto" latinLnBrk="0" hangingPunct="1">
-                      <a:lnSpc>
-                        <a:spcPct val="100000"/>
-                      </a:lnSpc>
-                      <a:spcBef>
-                        <a:spcPts val="0"/>
-                      </a:spcBef>
-                      <a:spcAft>
-                        <a:spcPts val="0"/>
-                      </a:spcAft>
-                      <a:buClrTx/>
-                      <a:buSzTx/>
-                      <a:buFontTx/>
-                      <a:buNone/>
-                      <a:tabLst/>
-                      <a:defRPr/>
-                    </a:pPr>
-                    <a:r>
-                      <a:rPr kumimoji="0" lang="en-GB" sz="400" b="0" i="0" u="none" strike="noStrike" kern="0" cap="none" spc="0" normalizeH="0" baseline="0">
-                        <a:ln>
-                          <a:noFill/>
-                        </a:ln>
-                        <a:solidFill>
-                          <a:schemeClr val="accent2"/>
-                        </a:solidFill>
-                        <a:effectLst/>
-                        <a:uLnTx/>
-                        <a:uFillTx/>
-                        <a:latin typeface="Montserrat Light"/>
-                        <a:ea typeface="+mn-ea"/>
-                        <a:cs typeface="Arial" panose="020B0604020202020204" pitchFamily="34" charset="0"/>
-                      </a:rPr>
-                      <a:t>Education</a:t>
-                    </a:r>
-                  </a:p>
-                </p:txBody>
-              </p:sp>
-              <p:sp>
-                <p:nvSpPr>
-                  <p:cNvPr id="35" name="Rectangle 95">
-                    <a:extLst>
-                      <a:ext uri="{FF2B5EF4-FFF2-40B4-BE49-F238E27FC236}">
-                        <a16:creationId xmlns:a16="http://schemas.microsoft.com/office/drawing/2014/main" id="{B458D666-5467-9FCE-865D-802E8DAFA549}"/>
-                      </a:ext>
-                    </a:extLst>
-                  </p:cNvPr>
-                  <p:cNvSpPr/>
-                  <p:nvPr/>
-                </p:nvSpPr>
-                <p:spPr>
-                  <a:xfrm>
-                    <a:off x="7229150" y="3429000"/>
-                    <a:ext cx="478972" cy="152633"/>
-                  </a:xfrm>
-                  <a:prstGeom prst="rect">
-                    <a:avLst/>
-                  </a:prstGeom>
-                  <a:grpFill/>
-                  <a:ln w="12700" cap="flat" cmpd="sng" algn="ctr">
-                    <a:solidFill>
-                      <a:schemeClr val="bg1">
-                        <a:lumMod val="75000"/>
-                      </a:schemeClr>
-                    </a:solidFill>
-                    <a:prstDash val="solid"/>
-                    <a:miter lim="800000"/>
-                  </a:ln>
-                  <a:effectLst/>
-                </p:spPr>
-                <p:txBody>
-                  <a:bodyPr lIns="36000" rtlCol="0" anchor="ctr"/>
-                  <a:lstStyle/>
-                  <a:p>
-                    <a:pPr marL="0" marR="0" lvl="0" indent="0" algn="ctr" defTabSz="914400" eaLnBrk="1" fontAlgn="auto" latinLnBrk="0" hangingPunct="1">
-                      <a:lnSpc>
-                        <a:spcPct val="100000"/>
-                      </a:lnSpc>
-                      <a:spcBef>
-                        <a:spcPts val="0"/>
-                      </a:spcBef>
-                      <a:spcAft>
-                        <a:spcPts val="0"/>
-                      </a:spcAft>
-                      <a:buClrTx/>
-                      <a:buSzTx/>
-                      <a:buFontTx/>
-                      <a:buNone/>
-                      <a:tabLst/>
-                      <a:defRPr/>
-                    </a:pPr>
-                    <a:r>
-                      <a:rPr kumimoji="0" lang="en-GB" sz="400" b="0" i="0" u="none" strike="noStrike" kern="0" cap="none" spc="0" normalizeH="0" baseline="0">
-                        <a:ln>
-                          <a:noFill/>
-                        </a:ln>
-                        <a:solidFill>
-                          <a:schemeClr val="accent2"/>
-                        </a:solidFill>
-                        <a:effectLst/>
-                        <a:uLnTx/>
-                        <a:uFillTx/>
-                        <a:latin typeface="Montserrat Light"/>
-                        <a:ea typeface="+mn-ea"/>
-                        <a:cs typeface="Arial" panose="020B0604020202020204" pitchFamily="34" charset="0"/>
-                      </a:rPr>
-                      <a:t>Consideration</a:t>
-                    </a:r>
-                  </a:p>
-                </p:txBody>
-              </p:sp>
-              <p:sp>
-                <p:nvSpPr>
-                  <p:cNvPr id="36" name="Rectangle 96">
-                    <a:extLst>
-                      <a:ext uri="{FF2B5EF4-FFF2-40B4-BE49-F238E27FC236}">
-                        <a16:creationId xmlns:a16="http://schemas.microsoft.com/office/drawing/2014/main" id="{A1B3396A-5A14-04FC-58F5-FD0E8692A73C}"/>
-                      </a:ext>
-                    </a:extLst>
-                  </p:cNvPr>
-                  <p:cNvSpPr/>
-                  <p:nvPr/>
-                </p:nvSpPr>
-                <p:spPr>
-                  <a:xfrm>
-                    <a:off x="7712268" y="3429000"/>
-                    <a:ext cx="478972" cy="152633"/>
-                  </a:xfrm>
-                  <a:prstGeom prst="rect">
-                    <a:avLst/>
-                  </a:prstGeom>
-                  <a:grpFill/>
-                  <a:ln w="12700" cap="flat" cmpd="sng" algn="ctr">
-                    <a:solidFill>
-                      <a:schemeClr val="bg1">
-                        <a:lumMod val="75000"/>
-                      </a:schemeClr>
-                    </a:solidFill>
-                    <a:prstDash val="solid"/>
-                    <a:miter lim="800000"/>
-                  </a:ln>
-                  <a:effectLst/>
-                </p:spPr>
-                <p:txBody>
-                  <a:bodyPr rtlCol="0" anchor="ctr"/>
-                  <a:lstStyle/>
-                  <a:p>
-                    <a:pPr marL="0" marR="0" lvl="0" indent="0" algn="ctr" defTabSz="914400" eaLnBrk="1" fontAlgn="auto" latinLnBrk="0" hangingPunct="1">
-                      <a:lnSpc>
-                        <a:spcPct val="100000"/>
-                      </a:lnSpc>
-                      <a:spcBef>
-                        <a:spcPts val="0"/>
-                      </a:spcBef>
-                      <a:spcAft>
-                        <a:spcPts val="0"/>
-                      </a:spcAft>
-                      <a:buClrTx/>
-                      <a:buSzTx/>
-                      <a:buFontTx/>
-                      <a:buNone/>
-                      <a:tabLst/>
-                      <a:defRPr/>
-                    </a:pPr>
-                    <a:r>
-                      <a:rPr kumimoji="0" lang="en-GB" sz="400" b="0" i="0" u="none" strike="noStrike" kern="0" cap="none" spc="0" normalizeH="0" baseline="0">
-                        <a:ln>
-                          <a:noFill/>
-                        </a:ln>
-                        <a:solidFill>
-                          <a:schemeClr val="accent2"/>
-                        </a:solidFill>
-                        <a:effectLst/>
-                        <a:uLnTx/>
-                        <a:uFillTx/>
-                        <a:latin typeface="Montserrat Light"/>
-                        <a:ea typeface="+mn-ea"/>
-                        <a:cs typeface="Arial" panose="020B0604020202020204" pitchFamily="34" charset="0"/>
-                      </a:rPr>
-                      <a:t>Purchase</a:t>
-                    </a:r>
-                  </a:p>
-                </p:txBody>
-              </p:sp>
-              <p:sp>
-                <p:nvSpPr>
-                  <p:cNvPr id="37" name="Rectangle 97">
-                    <a:extLst>
-                      <a:ext uri="{FF2B5EF4-FFF2-40B4-BE49-F238E27FC236}">
-                        <a16:creationId xmlns:a16="http://schemas.microsoft.com/office/drawing/2014/main" id="{F0CF4772-562C-5866-43DA-0984CD273A58}"/>
-                      </a:ext>
-                    </a:extLst>
-                  </p:cNvPr>
-                  <p:cNvSpPr/>
-                  <p:nvPr/>
-                </p:nvSpPr>
-                <p:spPr>
-                  <a:xfrm>
-                    <a:off x="8195386" y="3429000"/>
-                    <a:ext cx="478972" cy="152633"/>
-                  </a:xfrm>
-                  <a:prstGeom prst="rect">
-                    <a:avLst/>
-                  </a:prstGeom>
-                  <a:grpFill/>
-                  <a:ln w="12700" cap="flat" cmpd="sng" algn="ctr">
-                    <a:solidFill>
-                      <a:schemeClr val="bg1">
-                        <a:lumMod val="75000"/>
-                      </a:schemeClr>
-                    </a:solidFill>
-                    <a:prstDash val="solid"/>
-                    <a:miter lim="800000"/>
-                  </a:ln>
-                  <a:effectLst/>
-                </p:spPr>
-                <p:txBody>
-                  <a:bodyPr rtlCol="0" anchor="ctr"/>
-                  <a:lstStyle/>
-                  <a:p>
-                    <a:pPr marL="0" marR="0" lvl="0" indent="0" algn="ctr" defTabSz="914400" eaLnBrk="1" fontAlgn="auto" latinLnBrk="0" hangingPunct="1">
-                      <a:lnSpc>
-                        <a:spcPct val="100000"/>
-                      </a:lnSpc>
-                      <a:spcBef>
-                        <a:spcPts val="0"/>
-                      </a:spcBef>
-                      <a:spcAft>
-                        <a:spcPts val="0"/>
-                      </a:spcAft>
-                      <a:buClrTx/>
-                      <a:buSzTx/>
-                      <a:buFontTx/>
-                      <a:buNone/>
-                      <a:tabLst/>
-                      <a:defRPr/>
-                    </a:pPr>
-                    <a:r>
-                      <a:rPr kumimoji="0" lang="en-GB" sz="400" b="0" i="0" u="none" strike="noStrike" kern="0" cap="none" spc="0" normalizeH="0" baseline="0">
-                        <a:ln>
-                          <a:noFill/>
-                        </a:ln>
-                        <a:solidFill>
-                          <a:schemeClr val="accent2"/>
-                        </a:solidFill>
-                        <a:effectLst/>
-                        <a:uLnTx/>
-                        <a:uFillTx/>
-                        <a:latin typeface="Montserrat Light"/>
-                        <a:ea typeface="+mn-ea"/>
-                        <a:cs typeface="Arial" panose="020B0604020202020204" pitchFamily="34" charset="0"/>
-                      </a:rPr>
-                      <a:t>Adoption</a:t>
-                    </a:r>
-                  </a:p>
-                </p:txBody>
-              </p:sp>
-              <p:sp>
-                <p:nvSpPr>
-                  <p:cNvPr id="38" name="Rectangle 98">
-                    <a:extLst>
-                      <a:ext uri="{FF2B5EF4-FFF2-40B4-BE49-F238E27FC236}">
-                        <a16:creationId xmlns:a16="http://schemas.microsoft.com/office/drawing/2014/main" id="{D676D0EB-E47E-E533-108B-417E72EF840B}"/>
-                      </a:ext>
-                    </a:extLst>
-                  </p:cNvPr>
-                  <p:cNvSpPr/>
-                  <p:nvPr/>
-                </p:nvSpPr>
-                <p:spPr>
-                  <a:xfrm>
-                    <a:off x="8678504" y="3429000"/>
-                    <a:ext cx="478972" cy="152633"/>
-                  </a:xfrm>
-                  <a:prstGeom prst="rect">
-                    <a:avLst/>
-                  </a:prstGeom>
-                  <a:grpFill/>
-                  <a:ln w="12700" cap="flat" cmpd="sng" algn="ctr">
-                    <a:solidFill>
-                      <a:schemeClr val="bg1">
-                        <a:lumMod val="75000"/>
-                      </a:schemeClr>
-                    </a:solidFill>
-                    <a:prstDash val="solid"/>
-                    <a:miter lim="800000"/>
-                  </a:ln>
-                  <a:effectLst/>
-                </p:spPr>
-                <p:txBody>
-                  <a:bodyPr rtlCol="0" anchor="ctr"/>
-                  <a:lstStyle/>
-                  <a:p>
-                    <a:pPr marL="0" marR="0" lvl="0" indent="0" algn="ctr" defTabSz="914400" eaLnBrk="1" fontAlgn="auto" latinLnBrk="0" hangingPunct="1">
-                      <a:lnSpc>
-                        <a:spcPct val="100000"/>
-                      </a:lnSpc>
-                      <a:spcBef>
-                        <a:spcPts val="0"/>
-                      </a:spcBef>
-                      <a:spcAft>
-                        <a:spcPts val="0"/>
-                      </a:spcAft>
-                      <a:buClrTx/>
-                      <a:buSzTx/>
-                      <a:buFontTx/>
-                      <a:buNone/>
-                      <a:tabLst/>
-                      <a:defRPr/>
-                    </a:pPr>
-                    <a:r>
-                      <a:rPr kumimoji="0" lang="en-GB" sz="400" b="0" i="0" u="none" strike="noStrike" kern="0" cap="none" spc="0" normalizeH="0" baseline="0">
-                        <a:ln>
-                          <a:noFill/>
-                        </a:ln>
-                        <a:solidFill>
-                          <a:schemeClr val="accent2"/>
-                        </a:solidFill>
-                        <a:effectLst/>
-                        <a:uLnTx/>
-                        <a:uFillTx/>
-                        <a:latin typeface="Montserrat Light"/>
-                        <a:ea typeface="+mn-ea"/>
-                        <a:cs typeface="Arial" panose="020B0604020202020204" pitchFamily="34" charset="0"/>
-                      </a:rPr>
-                      <a:t>Retention</a:t>
-                    </a:r>
-                  </a:p>
-                </p:txBody>
-              </p:sp>
-              <p:sp>
-                <p:nvSpPr>
-                  <p:cNvPr id="39" name="Rectangle 99">
-                    <a:extLst>
-                      <a:ext uri="{FF2B5EF4-FFF2-40B4-BE49-F238E27FC236}">
-                        <a16:creationId xmlns:a16="http://schemas.microsoft.com/office/drawing/2014/main" id="{BD51DF40-BD5B-A09B-D590-6CE5BBF1C1D9}"/>
-                      </a:ext>
-                    </a:extLst>
-                  </p:cNvPr>
-                  <p:cNvSpPr/>
-                  <p:nvPr/>
-                </p:nvSpPr>
-                <p:spPr>
-                  <a:xfrm>
-                    <a:off x="9161622" y="3429000"/>
-                    <a:ext cx="478972" cy="152633"/>
-                  </a:xfrm>
-                  <a:prstGeom prst="rect">
-                    <a:avLst/>
-                  </a:prstGeom>
-                  <a:grpFill/>
-                  <a:ln w="12700" cap="flat" cmpd="sng" algn="ctr">
-                    <a:solidFill>
-                      <a:schemeClr val="bg1">
-                        <a:lumMod val="75000"/>
-                      </a:schemeClr>
-                    </a:solidFill>
-                    <a:prstDash val="solid"/>
-                    <a:miter lim="800000"/>
-                  </a:ln>
-                  <a:effectLst/>
-                </p:spPr>
-                <p:txBody>
-                  <a:bodyPr rtlCol="0" anchor="ctr"/>
-                  <a:lstStyle/>
-                  <a:p>
-                    <a:pPr marL="0" marR="0" lvl="0" indent="0" algn="ctr" defTabSz="914400" eaLnBrk="1" fontAlgn="auto" latinLnBrk="0" hangingPunct="1">
-                      <a:lnSpc>
-                        <a:spcPct val="100000"/>
-                      </a:lnSpc>
-                      <a:spcBef>
-                        <a:spcPts val="0"/>
-                      </a:spcBef>
-                      <a:spcAft>
-                        <a:spcPts val="0"/>
-                      </a:spcAft>
-                      <a:buClrTx/>
-                      <a:buSzTx/>
-                      <a:buFontTx/>
-                      <a:buNone/>
-                      <a:tabLst/>
-                      <a:defRPr/>
-                    </a:pPr>
-                    <a:r>
-                      <a:rPr kumimoji="0" lang="en-GB" sz="400" b="0" i="0" u="none" strike="noStrike" kern="0" cap="none" spc="0" normalizeH="0" baseline="0">
-                        <a:ln>
-                          <a:noFill/>
-                        </a:ln>
-                        <a:solidFill>
-                          <a:schemeClr val="accent2"/>
-                        </a:solidFill>
-                        <a:effectLst/>
-                        <a:uLnTx/>
-                        <a:uFillTx/>
-                        <a:latin typeface="Montserrat Light"/>
-                        <a:ea typeface="+mn-ea"/>
-                        <a:cs typeface="Arial" panose="020B0604020202020204" pitchFamily="34" charset="0"/>
-                      </a:rPr>
-                      <a:t>Expansion</a:t>
-                    </a:r>
-                  </a:p>
-                </p:txBody>
-              </p:sp>
-              <p:sp>
-                <p:nvSpPr>
-                  <p:cNvPr id="40" name="Rectangle 102">
-                    <a:extLst>
-                      <a:ext uri="{FF2B5EF4-FFF2-40B4-BE49-F238E27FC236}">
-                        <a16:creationId xmlns:a16="http://schemas.microsoft.com/office/drawing/2014/main" id="{9DE860FC-C1AF-026C-8AF3-0E115EFFB089}"/>
-                      </a:ext>
-                    </a:extLst>
-                  </p:cNvPr>
-                  <p:cNvSpPr/>
-                  <p:nvPr/>
-                </p:nvSpPr>
-                <p:spPr>
-                  <a:xfrm>
-                    <a:off x="9644743" y="3429000"/>
-                    <a:ext cx="478972" cy="152633"/>
-                  </a:xfrm>
-                  <a:prstGeom prst="rect">
-                    <a:avLst/>
-                  </a:prstGeom>
-                  <a:grpFill/>
-                  <a:ln w="12700" cap="flat" cmpd="sng" algn="ctr">
-                    <a:solidFill>
-                      <a:schemeClr val="bg1">
-                        <a:lumMod val="75000"/>
-                      </a:schemeClr>
-                    </a:solidFill>
-                    <a:prstDash val="solid"/>
-                    <a:miter lim="800000"/>
-                  </a:ln>
-                  <a:effectLst/>
-                </p:spPr>
-                <p:txBody>
-                  <a:bodyPr rtlCol="0" anchor="ctr"/>
-                  <a:lstStyle/>
-                  <a:p>
-                    <a:pPr marL="0" marR="0" lvl="0" indent="0" algn="ctr" defTabSz="914400" eaLnBrk="1" fontAlgn="auto" latinLnBrk="0" hangingPunct="1">
-                      <a:lnSpc>
-                        <a:spcPct val="100000"/>
-                      </a:lnSpc>
-                      <a:spcBef>
-                        <a:spcPts val="0"/>
-                      </a:spcBef>
-                      <a:spcAft>
-                        <a:spcPts val="0"/>
-                      </a:spcAft>
-                      <a:buClrTx/>
-                      <a:buSzTx/>
-                      <a:buFontTx/>
-                      <a:buNone/>
-                      <a:tabLst/>
-                      <a:defRPr/>
-                    </a:pPr>
-                    <a:r>
-                      <a:rPr kumimoji="0" lang="en-GB" sz="400" b="0" i="0" u="none" strike="noStrike" kern="0" cap="none" spc="0" normalizeH="0" baseline="0">
-                        <a:ln>
-                          <a:noFill/>
-                        </a:ln>
-                        <a:solidFill>
-                          <a:schemeClr val="accent2"/>
-                        </a:solidFill>
-                        <a:effectLst/>
-                        <a:uLnTx/>
-                        <a:uFillTx/>
-                        <a:latin typeface="Montserrat Light"/>
-                        <a:ea typeface="+mn-ea"/>
-                        <a:cs typeface="Arial" panose="020B0604020202020204" pitchFamily="34" charset="0"/>
-                      </a:rPr>
-                      <a:t>Advocacy</a:t>
-                    </a:r>
-                  </a:p>
-                </p:txBody>
-              </p:sp>
-            </p:grpSp>
-            <p:sp>
-              <p:nvSpPr>
-                <p:cNvPr id="18" name="Oval 36">
-                  <a:extLst>
-                    <a:ext uri="{FF2B5EF4-FFF2-40B4-BE49-F238E27FC236}">
-                      <a16:creationId xmlns:a16="http://schemas.microsoft.com/office/drawing/2014/main" id="{E2197E5A-FA38-276A-D0BB-5B766EC2C4B0}"/>
-                    </a:ext>
-                  </a:extLst>
-                </p:cNvPr>
-                <p:cNvSpPr/>
-                <p:nvPr/>
-              </p:nvSpPr>
-              <p:spPr>
-                <a:xfrm>
-                  <a:off x="6354935" y="3149836"/>
-                  <a:ext cx="72000" cy="72000"/>
-                </a:xfrm>
-                <a:prstGeom prst="ellipse">
-                  <a:avLst/>
-                </a:prstGeom>
-                <a:grpFill/>
-                <a:ln w="12700" cap="flat" cmpd="sng" algn="ctr">
-                  <a:solidFill>
-                    <a:schemeClr val="bg1">
-                      <a:lumMod val="75000"/>
-                    </a:schemeClr>
-                  </a:solidFill>
-                  <a:prstDash val="solid"/>
-                  <a:miter lim="800000"/>
-                </a:ln>
-                <a:effectLst/>
-              </p:spPr>
-              <p:txBody>
-                <a:bodyPr rtlCol="0" anchor="ctr"/>
-                <a:lstStyle/>
-                <a:p>
-                  <a:pPr marL="0" marR="0" lvl="0" indent="0" algn="ctr" defTabSz="914400" eaLnBrk="1" fontAlgn="auto" latinLnBrk="0" hangingPunct="1">
-                    <a:lnSpc>
-                      <a:spcPct val="100000"/>
-                    </a:lnSpc>
-                    <a:spcBef>
-                      <a:spcPts val="0"/>
-                    </a:spcBef>
-                    <a:spcAft>
-                      <a:spcPts val="0"/>
-                    </a:spcAft>
-                    <a:buClrTx/>
-                    <a:buSzTx/>
-                    <a:buFontTx/>
-                    <a:buNone/>
-                    <a:tabLst/>
-                    <a:defRPr/>
-                  </a:pPr>
-                  <a:r>
-                    <a:rPr kumimoji="0" lang="en-GB" sz="600" b="0" i="0" u="none" strike="noStrike" kern="0" cap="none" spc="0" normalizeH="0" baseline="0">
-                      <a:ln>
-                        <a:noFill/>
-                      </a:ln>
-                      <a:solidFill>
-                        <a:schemeClr val="accent2"/>
-                      </a:solidFill>
-                      <a:effectLst/>
-                      <a:uLnTx/>
-                      <a:uFillTx/>
-                      <a:latin typeface="Montserrat Light"/>
-                      <a:ea typeface="+mn-ea"/>
-                      <a:cs typeface="Cordia New"/>
-                    </a:rPr>
-                    <a:t>3</a:t>
-                  </a:r>
-                </a:p>
-              </p:txBody>
-            </p:sp>
-            <p:sp>
-              <p:nvSpPr>
-                <p:cNvPr id="19" name="Oval 39">
-                  <a:extLst>
-                    <a:ext uri="{FF2B5EF4-FFF2-40B4-BE49-F238E27FC236}">
-                      <a16:creationId xmlns:a16="http://schemas.microsoft.com/office/drawing/2014/main" id="{2AE0AB01-F9A8-8A71-E18B-EDAA22B375A5}"/>
-                    </a:ext>
-                  </a:extLst>
-                </p:cNvPr>
-                <p:cNvSpPr/>
-                <p:nvPr/>
-              </p:nvSpPr>
-              <p:spPr>
-                <a:xfrm>
-                  <a:off x="6499916" y="3230393"/>
-                  <a:ext cx="72000" cy="72000"/>
-                </a:xfrm>
-                <a:prstGeom prst="ellipse">
-                  <a:avLst/>
-                </a:prstGeom>
-                <a:grpFill/>
-                <a:ln w="12700" cap="flat" cmpd="sng" algn="ctr">
-                  <a:solidFill>
-                    <a:schemeClr val="bg1">
-                      <a:lumMod val="75000"/>
-                    </a:schemeClr>
-                  </a:solidFill>
-                  <a:prstDash val="solid"/>
-                  <a:miter lim="800000"/>
-                </a:ln>
-                <a:effectLst/>
-              </p:spPr>
-              <p:txBody>
-                <a:bodyPr rtlCol="0" anchor="ctr"/>
-                <a:lstStyle/>
-                <a:p>
-                  <a:pPr marL="0" marR="0" lvl="0" indent="0" algn="ctr" defTabSz="914400" eaLnBrk="1" fontAlgn="auto" latinLnBrk="0" hangingPunct="1">
-                    <a:lnSpc>
-                      <a:spcPct val="100000"/>
-                    </a:lnSpc>
-                    <a:spcBef>
-                      <a:spcPts val="0"/>
-                    </a:spcBef>
-                    <a:spcAft>
-                      <a:spcPts val="0"/>
-                    </a:spcAft>
-                    <a:buClrTx/>
-                    <a:buSzTx/>
-                    <a:buFontTx/>
-                    <a:buNone/>
-                    <a:tabLst/>
-                    <a:defRPr/>
-                  </a:pPr>
-                  <a:r>
-                    <a:rPr kumimoji="0" lang="en-GB" sz="600" b="0" i="0" u="none" strike="noStrike" kern="0" cap="none" spc="0" normalizeH="0" baseline="0">
-                      <a:ln>
-                        <a:noFill/>
-                      </a:ln>
-                      <a:solidFill>
-                        <a:schemeClr val="accent2"/>
-                      </a:solidFill>
-                      <a:effectLst/>
-                      <a:uLnTx/>
-                      <a:uFillTx/>
-                      <a:latin typeface="Montserrat Light"/>
-                      <a:ea typeface="+mn-ea"/>
-                      <a:cs typeface="Cordia New"/>
-                    </a:rPr>
-                    <a:t>6</a:t>
-                  </a:r>
-                </a:p>
-              </p:txBody>
-            </p:sp>
-            <p:sp>
-              <p:nvSpPr>
-                <p:cNvPr id="20" name="Oval 41">
-                  <a:extLst>
-                    <a:ext uri="{FF2B5EF4-FFF2-40B4-BE49-F238E27FC236}">
-                      <a16:creationId xmlns:a16="http://schemas.microsoft.com/office/drawing/2014/main" id="{CEEC540A-A6F3-6CF5-B360-E5F3BDEB5F67}"/>
-                    </a:ext>
-                  </a:extLst>
-                </p:cNvPr>
-                <p:cNvSpPr/>
-                <p:nvPr/>
-              </p:nvSpPr>
-              <p:spPr>
-                <a:xfrm>
-                  <a:off x="6581500" y="3079121"/>
-                  <a:ext cx="108000" cy="108000"/>
-                </a:xfrm>
-                <a:prstGeom prst="ellipse">
-                  <a:avLst/>
-                </a:prstGeom>
-                <a:grpFill/>
-                <a:ln w="12700" cap="flat" cmpd="sng" algn="ctr">
-                  <a:solidFill>
-                    <a:schemeClr val="bg1">
-                      <a:lumMod val="75000"/>
-                    </a:schemeClr>
-                  </a:solidFill>
-                  <a:prstDash val="solid"/>
-                  <a:miter lim="800000"/>
-                </a:ln>
-                <a:effectLst/>
-              </p:spPr>
-              <p:txBody>
-                <a:bodyPr rtlCol="0" anchor="ctr"/>
-                <a:lstStyle/>
-                <a:p>
-                  <a:pPr marL="0" marR="0" lvl="0" indent="0" algn="ctr" defTabSz="914400" eaLnBrk="1" fontAlgn="auto" latinLnBrk="0" hangingPunct="1">
-                    <a:lnSpc>
-                      <a:spcPct val="100000"/>
-                    </a:lnSpc>
-                    <a:spcBef>
-                      <a:spcPts val="0"/>
-                    </a:spcBef>
-                    <a:spcAft>
-                      <a:spcPts val="0"/>
-                    </a:spcAft>
-                    <a:buClrTx/>
-                    <a:buSzTx/>
-                    <a:buFontTx/>
-                    <a:buNone/>
-                    <a:tabLst/>
-                    <a:defRPr/>
-                  </a:pPr>
-                  <a:r>
-                    <a:rPr kumimoji="0" lang="en-GB" sz="600" b="0" i="0" u="none" strike="noStrike" kern="0" cap="none" spc="0" normalizeH="0" baseline="0">
-                      <a:ln>
-                        <a:noFill/>
-                      </a:ln>
-                      <a:solidFill>
-                        <a:schemeClr val="accent2"/>
-                      </a:solidFill>
-                      <a:effectLst/>
-                      <a:uLnTx/>
-                      <a:uFillTx/>
-                      <a:latin typeface="Montserrat Light"/>
-                      <a:ea typeface="+mn-ea"/>
-                      <a:cs typeface="Cordia New"/>
-                    </a:rPr>
-                    <a:t>1</a:t>
-                  </a:r>
-                </a:p>
-              </p:txBody>
-            </p:sp>
-            <p:sp>
-              <p:nvSpPr>
-                <p:cNvPr id="21" name="Oval 42">
-                  <a:extLst>
-                    <a:ext uri="{FF2B5EF4-FFF2-40B4-BE49-F238E27FC236}">
-                      <a16:creationId xmlns:a16="http://schemas.microsoft.com/office/drawing/2014/main" id="{823368A5-14EF-B0AE-9FA2-4A8FD8D619B1}"/>
-                    </a:ext>
-                  </a:extLst>
-                </p:cNvPr>
-                <p:cNvSpPr/>
-                <p:nvPr/>
-              </p:nvSpPr>
-              <p:spPr>
-                <a:xfrm rot="21313542">
-                  <a:off x="6816450" y="3167993"/>
-                  <a:ext cx="108000" cy="108000"/>
-                </a:xfrm>
-                <a:prstGeom prst="ellipse">
-                  <a:avLst/>
-                </a:prstGeom>
-                <a:grpFill/>
-                <a:ln w="12700" cap="flat" cmpd="sng" algn="ctr">
-                  <a:solidFill>
-                    <a:schemeClr val="bg1">
-                      <a:lumMod val="75000"/>
-                    </a:schemeClr>
-                  </a:solidFill>
-                  <a:prstDash val="solid"/>
-                  <a:miter lim="800000"/>
-                </a:ln>
-                <a:effectLst/>
-              </p:spPr>
-              <p:txBody>
-                <a:bodyPr rtlCol="0" anchor="ctr"/>
-                <a:lstStyle/>
-                <a:p>
-                  <a:pPr marL="0" marR="0" lvl="0" indent="0" algn="ctr" defTabSz="914400" eaLnBrk="1" fontAlgn="auto" latinLnBrk="0" hangingPunct="1">
-                    <a:lnSpc>
-                      <a:spcPct val="100000"/>
-                    </a:lnSpc>
-                    <a:spcBef>
-                      <a:spcPts val="0"/>
-                    </a:spcBef>
-                    <a:spcAft>
-                      <a:spcPts val="0"/>
-                    </a:spcAft>
-                    <a:buClrTx/>
-                    <a:buSzTx/>
-                    <a:buFontTx/>
-                    <a:buNone/>
-                    <a:tabLst/>
-                    <a:defRPr/>
-                  </a:pPr>
-                  <a:r>
-                    <a:rPr kumimoji="0" lang="en-GB" sz="600" b="0" i="0" u="none" strike="noStrike" kern="0" cap="none" spc="0" normalizeH="0" baseline="0">
-                      <a:ln>
-                        <a:noFill/>
-                      </a:ln>
-                      <a:solidFill>
-                        <a:schemeClr val="accent2"/>
-                      </a:solidFill>
-                      <a:effectLst/>
-                      <a:uLnTx/>
-                      <a:uFillTx/>
-                      <a:latin typeface="Montserrat Light"/>
-                      <a:ea typeface="+mn-ea"/>
-                      <a:cs typeface="Cordia New"/>
-                    </a:rPr>
-                    <a:t>4</a:t>
-                  </a:r>
-                </a:p>
-              </p:txBody>
-            </p:sp>
-            <p:sp>
-              <p:nvSpPr>
-                <p:cNvPr id="22" name="Oval 43">
-                  <a:extLst>
-                    <a:ext uri="{FF2B5EF4-FFF2-40B4-BE49-F238E27FC236}">
-                      <a16:creationId xmlns:a16="http://schemas.microsoft.com/office/drawing/2014/main" id="{16560D72-CC87-868F-6A69-5087E2F45F9E}"/>
-                    </a:ext>
-                  </a:extLst>
-                </p:cNvPr>
-                <p:cNvSpPr/>
-                <p:nvPr/>
-              </p:nvSpPr>
-              <p:spPr>
-                <a:xfrm>
-                  <a:off x="6820758" y="2995250"/>
-                  <a:ext cx="108000" cy="108000"/>
-                </a:xfrm>
-                <a:prstGeom prst="ellipse">
-                  <a:avLst/>
-                </a:prstGeom>
-                <a:grpFill/>
-                <a:ln w="12700" cap="flat" cmpd="sng" algn="ctr">
-                  <a:solidFill>
-                    <a:schemeClr val="bg1">
-                      <a:lumMod val="75000"/>
-                    </a:schemeClr>
-                  </a:solidFill>
-                  <a:prstDash val="solid"/>
-                  <a:miter lim="800000"/>
-                </a:ln>
-                <a:effectLst/>
-              </p:spPr>
-              <p:txBody>
-                <a:bodyPr lIns="0" rIns="0" rtlCol="0" anchor="ctr"/>
-                <a:lstStyle/>
-                <a:p>
-                  <a:pPr marL="0" marR="0" lvl="0" indent="0" algn="ctr" defTabSz="914400" fontAlgn="auto" latinLnBrk="0" hangingPunct="1">
-                    <a:lnSpc>
-                      <a:spcPct val="100000"/>
-                    </a:lnSpc>
-                    <a:spcBef>
-                      <a:spcPts val="0"/>
-                    </a:spcBef>
-                    <a:spcAft>
-                      <a:spcPts val="0"/>
-                    </a:spcAft>
-                    <a:buClrTx/>
-                    <a:buSzTx/>
-                    <a:buFontTx/>
-                    <a:buNone/>
-                    <a:tabLst/>
-                    <a:defRPr/>
-                  </a:pPr>
-                  <a:endParaRPr kumimoji="0" lang="en-GB" sz="600" b="0" i="0" u="none" strike="noStrike" kern="0" cap="none" spc="0" normalizeH="0" baseline="0">
-                    <a:ln>
-                      <a:noFill/>
-                    </a:ln>
-                    <a:solidFill>
-                      <a:schemeClr val="accent2"/>
-                    </a:solidFill>
-                    <a:effectLst/>
-                    <a:uLnTx/>
-                    <a:uFillTx/>
-                    <a:latin typeface="Montserrat Light"/>
-                    <a:ea typeface="+mn-ea"/>
-                    <a:cs typeface="Cordia New"/>
-                  </a:endParaRPr>
-                </a:p>
-              </p:txBody>
-            </p:sp>
-            <p:sp>
-              <p:nvSpPr>
-                <p:cNvPr id="23" name="Oval 44">
-                  <a:extLst>
-                    <a:ext uri="{FF2B5EF4-FFF2-40B4-BE49-F238E27FC236}">
-                      <a16:creationId xmlns:a16="http://schemas.microsoft.com/office/drawing/2014/main" id="{598105A2-214C-9554-DB32-D2CAA1A6EE3B}"/>
-                    </a:ext>
-                  </a:extLst>
-                </p:cNvPr>
-                <p:cNvSpPr/>
-                <p:nvPr/>
-              </p:nvSpPr>
-              <p:spPr>
-                <a:xfrm>
-                  <a:off x="7221657" y="2951964"/>
-                  <a:ext cx="216000" cy="216000"/>
-                </a:xfrm>
-                <a:prstGeom prst="ellipse">
-                  <a:avLst/>
-                </a:prstGeom>
-                <a:grpFill/>
-                <a:ln w="12700" cap="flat" cmpd="sng" algn="ctr">
-                  <a:solidFill>
-                    <a:schemeClr val="bg1">
-                      <a:lumMod val="75000"/>
-                    </a:schemeClr>
-                  </a:solidFill>
-                  <a:prstDash val="solid"/>
-                  <a:miter lim="800000"/>
-                </a:ln>
-                <a:effectLst/>
-              </p:spPr>
-              <p:txBody>
-                <a:bodyPr lIns="0" rIns="0" rtlCol="0" anchor="ctr"/>
-                <a:lstStyle/>
-                <a:p>
-                  <a:pPr marL="0" marR="0" lvl="0" indent="0" algn="ctr" defTabSz="914400" eaLnBrk="1" fontAlgn="auto" latinLnBrk="0" hangingPunct="1">
-                    <a:lnSpc>
-                      <a:spcPct val="100000"/>
-                    </a:lnSpc>
-                    <a:spcBef>
-                      <a:spcPts val="0"/>
-                    </a:spcBef>
-                    <a:spcAft>
-                      <a:spcPts val="0"/>
-                    </a:spcAft>
-                    <a:buClrTx/>
-                    <a:buSzTx/>
-                    <a:buFontTx/>
-                    <a:buNone/>
-                    <a:tabLst/>
-                    <a:defRPr/>
-                  </a:pPr>
-                  <a:r>
-                    <a:rPr kumimoji="0" lang="en-GB" sz="600" b="0" i="0" u="none" strike="noStrike" kern="0" cap="none" spc="0" normalizeH="0" baseline="0">
-                      <a:ln>
-                        <a:noFill/>
-                      </a:ln>
-                      <a:solidFill>
-                        <a:schemeClr val="accent2"/>
-                      </a:solidFill>
-                      <a:effectLst/>
-                      <a:uLnTx/>
-                      <a:uFillTx/>
-                      <a:latin typeface="Montserrat Light"/>
-                      <a:ea typeface="+mn-ea"/>
-                      <a:cs typeface="Cordia New"/>
-                    </a:rPr>
-                    <a:t>7</a:t>
-                  </a:r>
-                </a:p>
-              </p:txBody>
-            </p:sp>
-            <p:sp>
-              <p:nvSpPr>
-                <p:cNvPr id="24" name="Oval 45">
-                  <a:extLst>
-                    <a:ext uri="{FF2B5EF4-FFF2-40B4-BE49-F238E27FC236}">
-                      <a16:creationId xmlns:a16="http://schemas.microsoft.com/office/drawing/2014/main" id="{23FEB1EF-969E-88DF-ECE2-2F70A00B9AE9}"/>
-                    </a:ext>
-                  </a:extLst>
-                </p:cNvPr>
-                <p:cNvSpPr/>
-                <p:nvPr/>
-              </p:nvSpPr>
-              <p:spPr>
-                <a:xfrm>
-                  <a:off x="7088564" y="3110329"/>
-                  <a:ext cx="144000" cy="144000"/>
-                </a:xfrm>
-                <a:prstGeom prst="ellipse">
-                  <a:avLst/>
-                </a:prstGeom>
-                <a:grpFill/>
-                <a:ln w="12700" cap="flat" cmpd="sng" algn="ctr">
-                  <a:solidFill>
-                    <a:schemeClr val="bg1">
-                      <a:lumMod val="75000"/>
-                    </a:schemeClr>
-                  </a:solidFill>
-                  <a:prstDash val="solid"/>
-                  <a:miter lim="800000"/>
-                </a:ln>
-                <a:effectLst/>
-              </p:spPr>
-              <p:txBody>
-                <a:bodyPr lIns="0" rIns="0" rtlCol="0" anchor="ctr"/>
-                <a:lstStyle/>
-                <a:p>
-                  <a:pPr marL="0" marR="0" lvl="0" indent="0" algn="ctr" defTabSz="914400" eaLnBrk="1" fontAlgn="auto" latinLnBrk="0" hangingPunct="1">
-                    <a:lnSpc>
-                      <a:spcPct val="100000"/>
-                    </a:lnSpc>
-                    <a:spcBef>
-                      <a:spcPts val="0"/>
-                    </a:spcBef>
-                    <a:spcAft>
-                      <a:spcPts val="0"/>
-                    </a:spcAft>
-                    <a:buClrTx/>
-                    <a:buSzTx/>
-                    <a:buFontTx/>
-                    <a:buNone/>
-                    <a:tabLst/>
-                    <a:defRPr/>
-                  </a:pPr>
-                  <a:r>
-                    <a:rPr kumimoji="0" lang="en-GB" sz="600" b="0" i="0" u="none" strike="noStrike" kern="0" cap="none" spc="0" normalizeH="0" baseline="0">
-                      <a:ln>
-                        <a:noFill/>
-                      </a:ln>
-                      <a:solidFill>
-                        <a:schemeClr val="accent2"/>
-                      </a:solidFill>
-                      <a:effectLst/>
-                      <a:uLnTx/>
-                      <a:uFillTx/>
-                      <a:latin typeface="Montserrat Light"/>
-                      <a:ea typeface="+mn-ea"/>
-                      <a:cs typeface="Cordia New"/>
-                    </a:rPr>
-                    <a:t>8</a:t>
-                  </a:r>
-                </a:p>
-              </p:txBody>
-            </p:sp>
-            <p:sp>
-              <p:nvSpPr>
-                <p:cNvPr id="25" name="Oval 46">
-                  <a:extLst>
-                    <a:ext uri="{FF2B5EF4-FFF2-40B4-BE49-F238E27FC236}">
-                      <a16:creationId xmlns:a16="http://schemas.microsoft.com/office/drawing/2014/main" id="{9311394C-8E8E-7DD8-65AA-28F3EEDA9FE1}"/>
-                    </a:ext>
-                  </a:extLst>
-                </p:cNvPr>
-                <p:cNvSpPr/>
-                <p:nvPr/>
-              </p:nvSpPr>
-              <p:spPr>
-                <a:xfrm>
-                  <a:off x="7414330" y="3086393"/>
-                  <a:ext cx="288000" cy="288000"/>
-                </a:xfrm>
-                <a:prstGeom prst="ellipse">
-                  <a:avLst/>
-                </a:prstGeom>
-                <a:grpFill/>
-                <a:ln w="12700" cap="flat" cmpd="sng" algn="ctr">
-                  <a:solidFill>
-                    <a:schemeClr val="bg1">
-                      <a:lumMod val="75000"/>
-                    </a:schemeClr>
-                  </a:solidFill>
-                  <a:prstDash val="solid"/>
-                  <a:miter lim="800000"/>
-                </a:ln>
-                <a:effectLst/>
-              </p:spPr>
-              <p:txBody>
-                <a:bodyPr rtlCol="0" anchor="ctr"/>
-                <a:lstStyle/>
-                <a:p>
-                  <a:pPr marL="0" marR="0" lvl="0" indent="0" algn="ctr" defTabSz="914400" eaLnBrk="1" fontAlgn="auto" latinLnBrk="0" hangingPunct="1">
-                    <a:lnSpc>
-                      <a:spcPct val="100000"/>
-                    </a:lnSpc>
-                    <a:spcBef>
-                      <a:spcPts val="0"/>
-                    </a:spcBef>
-                    <a:spcAft>
-                      <a:spcPts val="0"/>
-                    </a:spcAft>
-                    <a:buClrTx/>
-                    <a:buSzTx/>
-                    <a:buFontTx/>
-                    <a:buNone/>
-                    <a:tabLst/>
-                    <a:defRPr/>
-                  </a:pPr>
-                  <a:r>
-                    <a:rPr kumimoji="0" lang="en-GB" sz="600" b="0" i="0" u="none" strike="noStrike" kern="0" cap="none" spc="0" normalizeH="0" baseline="0">
-                      <a:ln>
-                        <a:noFill/>
-                      </a:ln>
-                      <a:solidFill>
-                        <a:schemeClr val="accent2"/>
-                      </a:solidFill>
-                      <a:effectLst/>
-                      <a:uLnTx/>
-                      <a:uFillTx/>
-                      <a:latin typeface="Montserrat Light"/>
-                      <a:ea typeface="+mn-ea"/>
-                      <a:cs typeface="Cordia New"/>
-                    </a:rPr>
-                    <a:t>5</a:t>
-                  </a:r>
-                </a:p>
-              </p:txBody>
-            </p:sp>
-            <p:sp>
-              <p:nvSpPr>
-                <p:cNvPr id="26" name="Oval 47">
-                  <a:extLst>
-                    <a:ext uri="{FF2B5EF4-FFF2-40B4-BE49-F238E27FC236}">
-                      <a16:creationId xmlns:a16="http://schemas.microsoft.com/office/drawing/2014/main" id="{CECD5852-9694-EA47-123C-4500CCE3B0C8}"/>
-                    </a:ext>
-                  </a:extLst>
-                </p:cNvPr>
-                <p:cNvSpPr/>
-                <p:nvPr/>
-              </p:nvSpPr>
-              <p:spPr>
-                <a:xfrm>
-                  <a:off x="7805989" y="3218784"/>
-                  <a:ext cx="108000" cy="108000"/>
-                </a:xfrm>
-                <a:prstGeom prst="ellipse">
-                  <a:avLst/>
-                </a:prstGeom>
-                <a:grpFill/>
-                <a:ln w="12700" cap="flat" cmpd="sng" algn="ctr">
-                  <a:solidFill>
-                    <a:schemeClr val="bg1">
-                      <a:lumMod val="75000"/>
-                    </a:schemeClr>
-                  </a:solidFill>
-                  <a:prstDash val="solid"/>
-                  <a:miter lim="800000"/>
-                </a:ln>
-                <a:effectLst/>
-              </p:spPr>
-              <p:txBody>
-                <a:bodyPr lIns="0" rIns="0" rtlCol="0" anchor="ctr"/>
-                <a:lstStyle/>
-                <a:p>
-                  <a:pPr marL="0" marR="0" lvl="0" indent="0" algn="ctr" defTabSz="914400" eaLnBrk="1" fontAlgn="auto" latinLnBrk="0" hangingPunct="1">
-                    <a:lnSpc>
-                      <a:spcPct val="100000"/>
-                    </a:lnSpc>
-                    <a:spcBef>
-                      <a:spcPts val="0"/>
-                    </a:spcBef>
-                    <a:spcAft>
-                      <a:spcPts val="0"/>
-                    </a:spcAft>
-                    <a:buClrTx/>
-                    <a:buSzTx/>
-                    <a:buFontTx/>
-                    <a:buNone/>
-                    <a:tabLst/>
-                    <a:defRPr/>
-                  </a:pPr>
-                  <a:endParaRPr kumimoji="0" lang="en-GB" sz="600" b="0" i="0" u="none" strike="noStrike" kern="0" cap="none" spc="0" normalizeH="0" baseline="0">
-                    <a:ln>
-                      <a:noFill/>
-                    </a:ln>
-                    <a:solidFill>
-                      <a:schemeClr val="accent2"/>
-                    </a:solidFill>
-                    <a:effectLst/>
-                    <a:uLnTx/>
-                    <a:uFillTx/>
-                    <a:latin typeface="Montserrat Light"/>
-                    <a:ea typeface="+mn-ea"/>
-                    <a:cs typeface="Cordia New"/>
-                  </a:endParaRPr>
-                </a:p>
-              </p:txBody>
-            </p:sp>
-            <p:sp>
-              <p:nvSpPr>
-                <p:cNvPr id="27" name="Oval 48">
-                  <a:extLst>
-                    <a:ext uri="{FF2B5EF4-FFF2-40B4-BE49-F238E27FC236}">
-                      <a16:creationId xmlns:a16="http://schemas.microsoft.com/office/drawing/2014/main" id="{A56A46D4-CFE4-8F7D-CB2C-DB7052C7A6C3}"/>
-                    </a:ext>
-                  </a:extLst>
-                </p:cNvPr>
-                <p:cNvSpPr/>
-                <p:nvPr/>
-              </p:nvSpPr>
-              <p:spPr>
-                <a:xfrm>
-                  <a:off x="7856270" y="3043042"/>
-                  <a:ext cx="108000" cy="108000"/>
-                </a:xfrm>
-                <a:prstGeom prst="ellipse">
-                  <a:avLst/>
-                </a:prstGeom>
-                <a:grpFill/>
-                <a:ln w="12700" cap="flat" cmpd="sng" algn="ctr">
-                  <a:solidFill>
-                    <a:schemeClr val="bg1">
-                      <a:lumMod val="75000"/>
-                    </a:schemeClr>
-                  </a:solidFill>
-                  <a:prstDash val="solid"/>
-                  <a:miter lim="800000"/>
-                </a:ln>
-                <a:effectLst/>
-              </p:spPr>
-              <p:txBody>
-                <a:bodyPr lIns="0" rIns="0" rtlCol="0" anchor="ctr"/>
-                <a:lstStyle/>
-                <a:p>
-                  <a:pPr marL="0" marR="0" lvl="0" indent="0" algn="ctr" defTabSz="914400" eaLnBrk="1" fontAlgn="auto" latinLnBrk="0" hangingPunct="1">
-                    <a:lnSpc>
-                      <a:spcPct val="100000"/>
-                    </a:lnSpc>
-                    <a:spcBef>
-                      <a:spcPts val="0"/>
-                    </a:spcBef>
-                    <a:spcAft>
-                      <a:spcPts val="0"/>
-                    </a:spcAft>
-                    <a:buClrTx/>
-                    <a:buSzTx/>
-                    <a:buFontTx/>
-                    <a:buNone/>
-                    <a:tabLst/>
-                    <a:defRPr/>
-                  </a:pPr>
-                  <a:r>
-                    <a:rPr kumimoji="0" lang="en-GB" sz="600" b="0" i="0" u="none" strike="noStrike" kern="0" cap="none" spc="0" normalizeH="0" baseline="0">
-                      <a:ln>
-                        <a:noFill/>
-                      </a:ln>
-                      <a:solidFill>
-                        <a:schemeClr val="accent2"/>
-                      </a:solidFill>
-                      <a:effectLst/>
-                      <a:uLnTx/>
-                      <a:uFillTx/>
-                      <a:latin typeface="Montserrat Light"/>
-                      <a:ea typeface="+mn-ea"/>
-                      <a:cs typeface="Cordia New"/>
-                    </a:rPr>
-                    <a:t>9</a:t>
-                  </a:r>
-                </a:p>
-              </p:txBody>
-            </p:sp>
-            <p:sp>
-              <p:nvSpPr>
-                <p:cNvPr id="28" name="Oval 49">
-                  <a:extLst>
-                    <a:ext uri="{FF2B5EF4-FFF2-40B4-BE49-F238E27FC236}">
-                      <a16:creationId xmlns:a16="http://schemas.microsoft.com/office/drawing/2014/main" id="{36EA1022-1675-8D3A-FB17-71E338567C03}"/>
-                    </a:ext>
-                  </a:extLst>
-                </p:cNvPr>
-                <p:cNvSpPr/>
-                <p:nvPr/>
-              </p:nvSpPr>
-              <p:spPr>
-                <a:xfrm>
-                  <a:off x="8036622" y="3122393"/>
-                  <a:ext cx="216000" cy="216000"/>
-                </a:xfrm>
-                <a:prstGeom prst="ellipse">
-                  <a:avLst/>
-                </a:prstGeom>
-                <a:grpFill/>
-                <a:ln w="12700" cap="flat" cmpd="sng" algn="ctr">
-                  <a:solidFill>
-                    <a:schemeClr val="bg1">
-                      <a:lumMod val="75000"/>
-                    </a:schemeClr>
-                  </a:solidFill>
-                  <a:prstDash val="solid"/>
-                  <a:miter lim="800000"/>
-                </a:ln>
-                <a:effectLst/>
-              </p:spPr>
-              <p:txBody>
-                <a:bodyPr lIns="0" tIns="45720" rIns="0" bIns="45720" rtlCol="0" anchor="ctr"/>
-                <a:lstStyle/>
-                <a:p>
-                  <a:pPr marL="0" marR="0" lvl="0" indent="0" algn="ctr" defTabSz="914400" eaLnBrk="1" fontAlgn="auto" latinLnBrk="0" hangingPunct="1">
-                    <a:lnSpc>
-                      <a:spcPct val="100000"/>
-                    </a:lnSpc>
-                    <a:spcBef>
-                      <a:spcPts val="0"/>
-                    </a:spcBef>
-                    <a:spcAft>
-                      <a:spcPts val="0"/>
-                    </a:spcAft>
-                    <a:buClrTx/>
-                    <a:buSzTx/>
-                    <a:buFontTx/>
-                    <a:buNone/>
-                    <a:tabLst/>
-                    <a:defRPr/>
-                  </a:pPr>
-                  <a:r>
-                    <a:rPr kumimoji="0" lang="en-GB" sz="600" b="0" i="0" u="none" strike="noStrike" kern="0" cap="none" spc="0" normalizeH="0" baseline="0">
-                      <a:ln>
-                        <a:noFill/>
-                      </a:ln>
-                      <a:solidFill>
-                        <a:schemeClr val="accent2"/>
-                      </a:solidFill>
-                      <a:effectLst/>
-                      <a:uLnTx/>
-                      <a:uFillTx/>
-                      <a:latin typeface="Montserrat Light"/>
-                      <a:cs typeface="Cordia New"/>
-                    </a:rPr>
-                    <a:t>11</a:t>
-                  </a:r>
-                  <a:endParaRPr lang="en-GB" sz="600" b="0" i="0" u="none" strike="noStrike" kern="0" cap="none" spc="0" normalizeH="0" baseline="0">
-                    <a:ln>
-                      <a:noFill/>
-                    </a:ln>
-                    <a:solidFill>
-                      <a:schemeClr val="accent2"/>
-                    </a:solidFill>
-                    <a:effectLst/>
-                    <a:uLnTx/>
-                    <a:uFillTx/>
-                    <a:latin typeface="Montserrat Light"/>
-                    <a:cs typeface="Cordia New"/>
-                  </a:endParaRPr>
-                </a:p>
-              </p:txBody>
-            </p:sp>
-            <p:sp>
-              <p:nvSpPr>
-                <p:cNvPr id="29" name="Oval 50">
-                  <a:extLst>
-                    <a:ext uri="{FF2B5EF4-FFF2-40B4-BE49-F238E27FC236}">
-                      <a16:creationId xmlns:a16="http://schemas.microsoft.com/office/drawing/2014/main" id="{116E2AE1-2BB5-CFBD-8282-4DC4ADC02167}"/>
-                    </a:ext>
-                  </a:extLst>
-                </p:cNvPr>
-                <p:cNvSpPr/>
-                <p:nvPr/>
-              </p:nvSpPr>
-              <p:spPr>
-                <a:xfrm>
-                  <a:off x="9233419" y="3137400"/>
-                  <a:ext cx="72000" cy="72000"/>
-                </a:xfrm>
-                <a:prstGeom prst="ellipse">
-                  <a:avLst/>
-                </a:prstGeom>
-                <a:grpFill/>
-                <a:ln w="12700" cap="flat" cmpd="sng" algn="ctr">
-                  <a:solidFill>
-                    <a:schemeClr val="bg1">
-                      <a:lumMod val="75000"/>
-                    </a:schemeClr>
-                  </a:solidFill>
-                  <a:prstDash val="solid"/>
-                  <a:miter lim="800000"/>
-                </a:ln>
-                <a:effectLst/>
-              </p:spPr>
-              <p:txBody>
-                <a:bodyPr lIns="0" rIns="0" rtlCol="0" anchor="ctr"/>
-                <a:lstStyle/>
-                <a:p>
-                  <a:pPr marL="0" marR="0" lvl="0" indent="0" algn="ctr" defTabSz="914400" eaLnBrk="1" fontAlgn="auto" latinLnBrk="0" hangingPunct="1">
-                    <a:lnSpc>
-                      <a:spcPct val="100000"/>
-                    </a:lnSpc>
-                    <a:spcBef>
-                      <a:spcPts val="0"/>
-                    </a:spcBef>
-                    <a:spcAft>
-                      <a:spcPts val="0"/>
-                    </a:spcAft>
-                    <a:buClrTx/>
-                    <a:buSzTx/>
-                    <a:buFontTx/>
-                    <a:buNone/>
-                    <a:tabLst/>
-                    <a:defRPr/>
-                  </a:pPr>
-                  <a:r>
-                    <a:rPr kumimoji="0" lang="en-GB" sz="600" b="0" i="0" u="none" strike="noStrike" kern="0" cap="none" spc="0" normalizeH="0" baseline="0">
-                      <a:ln>
-                        <a:noFill/>
-                      </a:ln>
-                      <a:solidFill>
-                        <a:schemeClr val="accent2"/>
-                      </a:solidFill>
-                      <a:effectLst/>
-                      <a:uLnTx/>
-                      <a:uFillTx/>
-                      <a:latin typeface="Montserrat Light"/>
-                      <a:ea typeface="+mn-ea"/>
-                      <a:cs typeface="Cordia New"/>
-                    </a:rPr>
-                    <a:t>14</a:t>
-                  </a:r>
-                </a:p>
-              </p:txBody>
-            </p:sp>
-            <p:sp>
-              <p:nvSpPr>
-                <p:cNvPr id="30" name="Oval 51">
-                  <a:extLst>
-                    <a:ext uri="{FF2B5EF4-FFF2-40B4-BE49-F238E27FC236}">
-                      <a16:creationId xmlns:a16="http://schemas.microsoft.com/office/drawing/2014/main" id="{48EADD02-9915-CDF7-4957-D3A67E67A7CB}"/>
-                    </a:ext>
-                  </a:extLst>
-                </p:cNvPr>
-                <p:cNvSpPr/>
-                <p:nvPr/>
-              </p:nvSpPr>
-              <p:spPr>
-                <a:xfrm>
-                  <a:off x="8442537" y="2977713"/>
-                  <a:ext cx="72000" cy="72000"/>
-                </a:xfrm>
-                <a:prstGeom prst="ellipse">
-                  <a:avLst/>
-                </a:prstGeom>
-                <a:grpFill/>
-                <a:ln w="12700" cap="flat" cmpd="sng" algn="ctr">
-                  <a:solidFill>
-                    <a:schemeClr val="bg1">
-                      <a:lumMod val="75000"/>
-                    </a:schemeClr>
-                  </a:solidFill>
-                  <a:prstDash val="solid"/>
-                  <a:miter lim="800000"/>
-                </a:ln>
-                <a:effectLst/>
-              </p:spPr>
-              <p:txBody>
-                <a:bodyPr lIns="0" rIns="0" rtlCol="0" anchor="ctr"/>
-                <a:lstStyle/>
-                <a:p>
-                  <a:pPr marL="0" marR="0" lvl="0" indent="0" algn="ctr" defTabSz="914400" eaLnBrk="1" fontAlgn="auto" latinLnBrk="0" hangingPunct="1">
-                    <a:lnSpc>
-                      <a:spcPct val="100000"/>
-                    </a:lnSpc>
-                    <a:spcBef>
-                      <a:spcPts val="0"/>
-                    </a:spcBef>
-                    <a:spcAft>
-                      <a:spcPts val="0"/>
-                    </a:spcAft>
-                    <a:buClrTx/>
-                    <a:buSzTx/>
-                    <a:buFontTx/>
-                    <a:buNone/>
-                    <a:tabLst/>
-                    <a:defRPr/>
-                  </a:pPr>
-                  <a:r>
-                    <a:rPr kumimoji="0" lang="en-GB" sz="400" b="0" i="0" u="none" strike="noStrike" kern="0" cap="none" spc="0" normalizeH="0" baseline="0">
-                      <a:ln>
-                        <a:noFill/>
-                      </a:ln>
-                      <a:solidFill>
-                        <a:schemeClr val="accent2"/>
-                      </a:solidFill>
-                      <a:effectLst/>
-                      <a:uLnTx/>
-                      <a:uFillTx/>
-                      <a:latin typeface="Montserrat Light"/>
-                      <a:ea typeface="+mn-ea"/>
-                      <a:cs typeface="Cordia New"/>
-                    </a:rPr>
-                    <a:t>12</a:t>
-                  </a:r>
-                </a:p>
-              </p:txBody>
-            </p:sp>
-            <p:sp>
-              <p:nvSpPr>
-                <p:cNvPr id="31" name="Oval 52">
-                  <a:extLst>
-                    <a:ext uri="{FF2B5EF4-FFF2-40B4-BE49-F238E27FC236}">
-                      <a16:creationId xmlns:a16="http://schemas.microsoft.com/office/drawing/2014/main" id="{A1066D93-E1FC-D26C-E9CD-8541FAFCBFD7}"/>
-                    </a:ext>
-                  </a:extLst>
-                </p:cNvPr>
-                <p:cNvSpPr/>
-                <p:nvPr/>
-              </p:nvSpPr>
-              <p:spPr>
-                <a:xfrm>
-                  <a:off x="8594937" y="3130113"/>
-                  <a:ext cx="72000" cy="72000"/>
-                </a:xfrm>
-                <a:prstGeom prst="ellipse">
-                  <a:avLst/>
-                </a:prstGeom>
-                <a:grpFill/>
-                <a:ln w="12700" cap="flat" cmpd="sng" algn="ctr">
-                  <a:solidFill>
-                    <a:schemeClr val="bg1">
-                      <a:lumMod val="75000"/>
-                    </a:schemeClr>
-                  </a:solidFill>
-                  <a:prstDash val="solid"/>
-                  <a:miter lim="800000"/>
-                </a:ln>
-                <a:effectLst/>
-              </p:spPr>
-              <p:txBody>
-                <a:bodyPr lIns="0" rIns="0" rtlCol="0" anchor="ctr"/>
-                <a:lstStyle/>
-                <a:p>
-                  <a:pPr marL="0" marR="0" lvl="0" indent="0" algn="ctr" defTabSz="914400" eaLnBrk="1" fontAlgn="auto" latinLnBrk="0" hangingPunct="1">
-                    <a:lnSpc>
-                      <a:spcPct val="100000"/>
-                    </a:lnSpc>
-                    <a:spcBef>
-                      <a:spcPts val="0"/>
-                    </a:spcBef>
-                    <a:spcAft>
-                      <a:spcPts val="0"/>
-                    </a:spcAft>
-                    <a:buClrTx/>
-                    <a:buSzTx/>
-                    <a:buFontTx/>
-                    <a:buNone/>
-                    <a:tabLst/>
-                    <a:defRPr/>
-                  </a:pPr>
-                  <a:r>
-                    <a:rPr kumimoji="0" lang="en-GB" sz="400" b="0" i="0" u="none" strike="noStrike" kern="0" cap="none" spc="0" normalizeH="0" baseline="0">
-                      <a:ln>
-                        <a:noFill/>
-                      </a:ln>
-                      <a:solidFill>
-                        <a:schemeClr val="accent2"/>
-                      </a:solidFill>
-                      <a:effectLst/>
-                      <a:uLnTx/>
-                      <a:uFillTx/>
-                      <a:latin typeface="Montserrat Light"/>
-                      <a:ea typeface="+mn-ea"/>
-                      <a:cs typeface="Cordia New"/>
-                    </a:rPr>
-                    <a:t>13</a:t>
-                  </a:r>
-                </a:p>
-              </p:txBody>
-            </p:sp>
-            <p:sp>
-              <p:nvSpPr>
-                <p:cNvPr id="32" name="Oval 53">
-                  <a:extLst>
-                    <a:ext uri="{FF2B5EF4-FFF2-40B4-BE49-F238E27FC236}">
-                      <a16:creationId xmlns:a16="http://schemas.microsoft.com/office/drawing/2014/main" id="{950C1FA3-C581-5516-AA74-0BCD91C8CC82}"/>
-                    </a:ext>
-                  </a:extLst>
-                </p:cNvPr>
-                <p:cNvSpPr/>
-                <p:nvPr/>
-              </p:nvSpPr>
-              <p:spPr>
-                <a:xfrm>
-                  <a:off x="6933904" y="3076684"/>
-                  <a:ext cx="108000" cy="108000"/>
-                </a:xfrm>
-                <a:prstGeom prst="ellipse">
-                  <a:avLst/>
-                </a:prstGeom>
-                <a:grpFill/>
-                <a:ln w="12700" cap="flat" cmpd="sng" algn="ctr">
-                  <a:solidFill>
-                    <a:schemeClr val="bg1">
-                      <a:lumMod val="75000"/>
-                    </a:schemeClr>
-                  </a:solidFill>
-                  <a:prstDash val="solid"/>
-                  <a:miter lim="800000"/>
-                </a:ln>
-                <a:effectLst/>
-              </p:spPr>
-              <p:txBody>
-                <a:bodyPr rtlCol="0" anchor="ctr"/>
-                <a:lstStyle/>
-                <a:p>
-                  <a:pPr marL="0" marR="0" lvl="0" indent="0" algn="ctr" defTabSz="914400" eaLnBrk="1" fontAlgn="auto" latinLnBrk="0" hangingPunct="1">
-                    <a:lnSpc>
-                      <a:spcPct val="100000"/>
-                    </a:lnSpc>
-                    <a:spcBef>
-                      <a:spcPts val="0"/>
-                    </a:spcBef>
-                    <a:spcAft>
-                      <a:spcPts val="0"/>
-                    </a:spcAft>
-                    <a:buClrTx/>
-                    <a:buSzTx/>
-                    <a:buFontTx/>
-                    <a:buNone/>
-                    <a:tabLst/>
-                    <a:defRPr/>
-                  </a:pPr>
-                  <a:r>
-                    <a:rPr kumimoji="0" lang="en-GB" sz="600" b="0" i="0" u="none" strike="noStrike" kern="0" cap="none" spc="0" normalizeH="0" baseline="0">
-                      <a:ln>
-                        <a:noFill/>
-                      </a:ln>
-                      <a:solidFill>
-                        <a:schemeClr val="accent2"/>
-                      </a:solidFill>
-                      <a:effectLst/>
-                      <a:uLnTx/>
-                      <a:uFillTx/>
-                      <a:latin typeface="Montserrat Light"/>
-                      <a:ea typeface="+mn-ea"/>
-                      <a:cs typeface="Cordia New"/>
-                    </a:rPr>
-                    <a:t>2</a:t>
-                  </a:r>
-                </a:p>
-              </p:txBody>
-            </p:sp>
-          </p:grpSp>
-          <p:sp>
-            <p:nvSpPr>
-              <p:cNvPr id="16" name="Rectangle 5">
-                <a:extLst>
-                  <a:ext uri="{FF2B5EF4-FFF2-40B4-BE49-F238E27FC236}">
-                    <a16:creationId xmlns:a16="http://schemas.microsoft.com/office/drawing/2014/main" id="{FA15E053-78F4-8297-1BB3-E874210D483E}"/>
-                  </a:ext>
-                </a:extLst>
-              </p:cNvPr>
-              <p:cNvSpPr txBox="1">
-                <a:spLocks noChangeArrowheads="1"/>
-              </p:cNvSpPr>
-              <p:nvPr/>
-            </p:nvSpPr>
-            <p:spPr>
-              <a:xfrm>
-                <a:off x="6857919" y="3650179"/>
-                <a:ext cx="4812073" cy="67427"/>
-              </a:xfrm>
-              <a:prstGeom prst="rect">
-                <a:avLst/>
-              </a:prstGeom>
-              <a:noFill/>
-              <a:ln/>
-            </p:spPr>
-            <p:txBody>
-              <a:bodyPr vert="horz" wrap="square" lIns="0" tIns="0" rIns="0" bIns="0" rtlCol="0" anchor="ctr">
-                <a:spAutoFit/>
-              </a:bodyPr>
-              <a:lstStyle/>
-              <a:p>
-                <a:pPr>
-                  <a:lnSpc>
-                    <a:spcPct val="90000"/>
-                  </a:lnSpc>
-                  <a:spcBef>
-                    <a:spcPts val="400"/>
-                  </a:spcBef>
-                  <a:buClr>
-                    <a:srgbClr val="000000"/>
-                  </a:buClr>
-                  <a:buSzPct val="100000"/>
-                </a:pPr>
-                <a:r>
-                  <a:rPr lang="en-GB" sz="400">
-                    <a:solidFill>
-                      <a:schemeClr val="accent1"/>
-                    </a:solidFill>
-                  </a:rPr>
-                  <a:t>1-14: order of behaviour;  Circle size: weight of </a:t>
-                </a:r>
-                <a:r>
-                  <a:rPr lang="en-GB" sz="400" err="1">
-                    <a:solidFill>
-                      <a:schemeClr val="accent1"/>
-                    </a:solidFill>
-                  </a:rPr>
-                  <a:t>behavior</a:t>
-                </a:r>
-                <a:endParaRPr lang="en-GB" sz="400">
-                  <a:solidFill>
-                    <a:schemeClr val="accent1"/>
-                  </a:solidFill>
-                </a:endParaRPr>
-              </a:p>
-            </p:txBody>
-          </p:sp>
-        </p:grpSp>
-        <p:sp>
-          <p:nvSpPr>
-            <p:cNvPr id="14" name="Rectangle 27">
-              <a:extLst>
-                <a:ext uri="{FF2B5EF4-FFF2-40B4-BE49-F238E27FC236}">
-                  <a16:creationId xmlns:a16="http://schemas.microsoft.com/office/drawing/2014/main" id="{AAC7374F-1363-5559-78F5-854AFE4CE145}"/>
-                </a:ext>
-              </a:extLst>
-            </p:cNvPr>
-            <p:cNvSpPr>
-              <a:spLocks noChangeAspect="1"/>
-            </p:cNvSpPr>
-            <p:nvPr/>
-          </p:nvSpPr>
-          <p:spPr>
-            <a:xfrm>
-              <a:off x="6507861" y="2561583"/>
-              <a:ext cx="5011597" cy="1232316"/>
-            </a:xfrm>
-            <a:prstGeom prst="rect">
-              <a:avLst/>
-            </a:prstGeom>
-            <a:noFill/>
-            <a:ln w="9525" cap="flat" cmpd="sng" algn="ctr">
-              <a:noFill/>
-              <a:prstDash val="solid"/>
-            </a:ln>
-            <a:effectLst/>
-          </p:spPr>
-          <p:txBody>
-            <a:bodyPr lIns="72000" tIns="0" rIns="72000" bIns="0" rtlCol="0" anchor="ctr"/>
-            <a:lstStyle/>
-            <a:p>
-              <a:pPr marL="0" marR="0" lvl="0" indent="0" algn="ctr" defTabSz="914400" fontAlgn="base" latinLnBrk="0" hangingPunct="1">
-                <a:lnSpc>
-                  <a:spcPct val="90000"/>
-                </a:lnSpc>
-                <a:spcBef>
-                  <a:spcPts val="300"/>
-                </a:spcBef>
-                <a:spcAft>
-                  <a:spcPct val="0"/>
-                </a:spcAft>
-                <a:buClrTx/>
-                <a:buSzTx/>
-                <a:buFontTx/>
-                <a:buNone/>
-                <a:tabLst/>
-                <a:defRPr/>
-              </a:pPr>
-              <a:endParaRPr kumimoji="0" lang="en-GB" sz="1300" b="0" i="0" u="none" strike="noStrike" kern="0" cap="none" spc="0" normalizeH="0" baseline="0">
-                <a:ln>
-                  <a:noFill/>
-                </a:ln>
-                <a:solidFill>
-                  <a:srgbClr val="8D9399"/>
-                </a:solidFill>
-                <a:effectLst/>
-                <a:uLnTx/>
-                <a:uFillTx/>
-                <a:latin typeface="Arial Narrow"/>
-                <a:cs typeface="Arial" pitchFamily="34" charset="0"/>
-              </a:endParaRPr>
-            </a:p>
-          </p:txBody>
-        </p:sp>
-      </p:grpSp>
-      <p:sp>
-        <p:nvSpPr>
-          <p:cNvPr id="41" name="Rectangle 27">
-            <a:extLst>
-              <a:ext uri="{FF2B5EF4-FFF2-40B4-BE49-F238E27FC236}">
-                <a16:creationId xmlns:a16="http://schemas.microsoft.com/office/drawing/2014/main" id="{22EB69C6-AA48-F10E-52C9-CC8BC1B4F59F}"/>
-              </a:ext>
-            </a:extLst>
-          </p:cNvPr>
-          <p:cNvSpPr>
-            <a:spLocks noChangeAspect="1"/>
-          </p:cNvSpPr>
-          <p:nvPr/>
-        </p:nvSpPr>
-        <p:spPr>
-          <a:xfrm>
-            <a:off x="917418" y="2026717"/>
-            <a:ext cx="2938080" cy="1137066"/>
-          </a:xfrm>
-          <a:prstGeom prst="rect">
-            <a:avLst/>
-          </a:prstGeom>
-          <a:noFill/>
-          <a:ln w="9525" cap="flat" cmpd="sng" algn="ctr">
-            <a:solidFill>
-              <a:srgbClr val="DEE0E3"/>
-            </a:solidFill>
-            <a:prstDash val="solid"/>
-          </a:ln>
-          <a:effectLst/>
-        </p:spPr>
-        <p:txBody>
-          <a:bodyPr lIns="72000" tIns="0" rIns="72000" bIns="0" rtlCol="0" anchor="ctr"/>
-          <a:lstStyle/>
-          <a:p>
-            <a:pPr marL="0" marR="0" lvl="0" indent="0" algn="ctr" defTabSz="914400" fontAlgn="base" latinLnBrk="0" hangingPunct="1">
-              <a:lnSpc>
-                <a:spcPct val="90000"/>
-              </a:lnSpc>
-              <a:spcBef>
-                <a:spcPts val="300"/>
-              </a:spcBef>
-              <a:spcAft>
-                <a:spcPct val="0"/>
-              </a:spcAft>
-              <a:buClrTx/>
-              <a:buSzTx/>
-              <a:buFontTx/>
-              <a:buNone/>
-              <a:tabLst/>
-              <a:defRPr/>
-            </a:pPr>
-            <a:endParaRPr kumimoji="0" lang="en-GB" sz="1300" b="0" i="0" u="none" strike="noStrike" kern="0" cap="none" spc="0" normalizeH="0" baseline="0">
-              <a:ln>
-                <a:noFill/>
-              </a:ln>
-              <a:solidFill>
-                <a:srgbClr val="8D9399"/>
-              </a:solidFill>
-              <a:effectLst/>
-              <a:uLnTx/>
-              <a:uFillTx/>
-              <a:latin typeface="Arial Narrow"/>
-              <a:cs typeface="Arial" pitchFamily="34" charset="0"/>
-            </a:endParaRPr>
-          </a:p>
-        </p:txBody>
-      </p:sp>
       <p:pic>
         <p:nvPicPr>
-          <p:cNvPr id="2" name="Picture 11" descr="A picture containing text, electronics, display, screenshot&#10;&#10;Description automatically generated">
+          <p:cNvPr id="42" name="ProjectPicture" descr="Project Picture">
             <a:extLst>
               <a:ext uri="{FF2B5EF4-FFF2-40B4-BE49-F238E27FC236}">
-                <a16:creationId xmlns:a16="http://schemas.microsoft.com/office/drawing/2014/main" id="{874E33A9-A26E-AC61-269F-82A8B44F6FBC}"/>
+                <a16:creationId xmlns:a16="http://schemas.microsoft.com/office/drawing/2014/main" id="{118C4FDC-BA2D-D92D-3265-2210F7B32C82}"/>
               </a:ext>
             </a:extLst>
           </p:cNvPr>
@@ -5173,6 +3194,42 @@
         </p:nvPicPr>
         <p:blipFill>
           <a:blip r:embed="rId2">
+            <a:extLst>
+              <a:ext uri="{28A0092B-C50C-407E-A947-70E740481C1C}">
+                <a14:useLocalDpi xmlns:a14="http://schemas.microsoft.com/office/drawing/2010/main" val="0"/>
+              </a:ext>
+            </a:extLst>
+          </a:blip>
+          <a:stretch>
+            <a:fillRect/>
+          </a:stretch>
+        </p:blipFill>
+        <p:spPr>
+          <a:xfrm>
+            <a:off x="852067" y="1612015"/>
+            <a:ext cx="3072816" cy="1921760"/>
+          </a:xfrm>
+          <a:prstGeom prst="rect">
+            <a:avLst/>
+          </a:prstGeom>
+        </p:spPr>
+      </p:pic>
+      <p:pic>
+        <p:nvPicPr>
+          <p:cNvPr id="43" name="Picture 11" descr="A picture containing text, electronics, display, screenshot  Description automatically generated">
+            <a:extLst>
+              <a:ext uri="{FF2B5EF4-FFF2-40B4-BE49-F238E27FC236}">
+                <a16:creationId xmlns:a16="http://schemas.microsoft.com/office/drawing/2014/main" id="{4630D809-514C-4692-A557-D2AA502C193B}"/>
+              </a:ext>
+            </a:extLst>
+          </p:cNvPr>
+          <p:cNvPicPr>
+            <a:picLocks noChangeAspect="1"/>
+          </p:cNvPicPr>
+          <p:nvPr/>
+        </p:nvPicPr>
+        <p:blipFill>
+          <a:blip r:embed="rId3">
             <a:extLst>
               <a:ext uri="{28A0092B-C50C-407E-A947-70E740481C1C}">
                 <a14:useLocalDpi xmlns:a14="http://schemas.microsoft.com/office/drawing/2010/main" val="0"/>

--- a/src/main/resources/templates/projectreferences/project_template_en.pptx
+++ b/src/main/resources/templates/projectreferences/project_template_en.pptx
@@ -247,7 +247,7 @@
           <a:p>
             <a:fld id="{C3440642-083C-45F1-96AE-6C40D1428CD6}" type="datetimeFigureOut">
               <a:rPr lang="en-GB" smtClean="0"/>
-              <a:t>15/05/2025</a:t>
+              <a:t>24/09/2025</a:t>
             </a:fld>
             <a:endParaRPr lang="en-GB"/>
           </a:p>
@@ -424,7 +424,7 @@
           <a:p>
             <a:fld id="{DEE2F1A5-1147-44AA-941C-401C9E3002E6}" type="datetimeFigureOut">
               <a:rPr lang="en-US" smtClean="0"/>
-              <a:t>5/15/25</a:t>
+              <a:t>9/24/2025</a:t>
             </a:fld>
             <a:endParaRPr lang="en-US"/>
           </a:p>
@@ -2846,7 +2846,7 @@
               <a:rPr lang="en-GB" dirty="0">
                 <a:cs typeface="Arial"/>
               </a:rPr>
-              <a:t>Customer segmentation is the base for use cases to support customers’ decision-process positively</a:t>
+              <a:t>A default title</a:t>
             </a:r>
             <a:endParaRPr lang="en-GB" dirty="0"/>
           </a:p>
@@ -2998,7 +2998,7 @@
           <a:p>
             <a:r>
               <a:rPr lang="en-GB" dirty="0"/>
-              <a:t>Enhanced customer lifecycle management through advanced segmentation</a:t>
+              <a:t>DefaultText1</a:t>
             </a:r>
           </a:p>
           <a:p>
@@ -3029,11 +3029,8 @@
           <a:p>
             <a:r>
               <a:rPr lang="en-GB" dirty="0"/>
-              <a:t>Improved ROI on marketing campaigns utilizing data-driven insights</a:t>
-            </a:r>
-          </a:p>
-          <a:p>
-            <a:endParaRPr lang="en-GB" dirty="0"/>
+              <a:t>DefaultText3</a:t>
+            </a:r>
           </a:p>
         </p:txBody>
       </p:sp>
@@ -3060,11 +3057,8 @@
           <a:p>
             <a:r>
               <a:rPr lang="en-GB" dirty="0"/>
-              <a:t>Identification of high-value customers leading to increased basket sizes</a:t>
-            </a:r>
-          </a:p>
-          <a:p>
-            <a:endParaRPr lang="en-GB" dirty="0"/>
+              <a:t>DefaultText2</a:t>
+            </a:r>
           </a:p>
         </p:txBody>
       </p:sp>
@@ -3091,17 +3085,14 @@
           <a:p>
             <a:r>
               <a:rPr lang="en-GB" dirty="0"/>
-              <a:t>Consumer interactions were not fully recognized across all platforms, missing crucial data points in the customer journey</a:t>
+              <a:t>Point1</a:t>
             </a:r>
           </a:p>
           <a:p>
             <a:r>
               <a:rPr lang="en-GB" dirty="0"/>
-              <a:t>There was a necessity to leverage the full potential of customer lifecycle data to inform business strategies</a:t>
-            </a:r>
-          </a:p>
-          <a:p>
-            <a:endParaRPr lang="en-GB" dirty="0"/>
+              <a:t>Point2</a:t>
+            </a:r>
           </a:p>
         </p:txBody>
       </p:sp>
@@ -3127,20 +3118,15 @@
           <a:lstStyle/>
           <a:p>
             <a:r>
-              <a:rPr lang="en-GB"/>
-              <a:t>Predictive analytics was employed to refine customer segmentation, taking into account interaction frequency, monetary value, and product categories</a:t>
-            </a:r>
-          </a:p>
-          <a:p>
-            <a:r>
-              <a:rPr lang="en-GB"/>
-              <a:t>This enabled the tailoring of marketing campaigns more precisely, significantly improving consumer engagement and purchasing </a:t>
-            </a:r>
-            <a:r>
-              <a:rPr lang="en-GB" err="1"/>
-              <a:t>behavior</a:t>
-            </a:r>
-            <a:endParaRPr lang="en-GB"/>
+              <a:rPr lang="en-GB" dirty="0"/>
+              <a:t>Point1</a:t>
+            </a:r>
+          </a:p>
+          <a:p>
+            <a:r>
+              <a:rPr lang="en-GB" dirty="0"/>
+              <a:t>Point2</a:t>
+            </a:r>
           </a:p>
         </p:txBody>
       </p:sp>
@@ -3166,14 +3152,14 @@
           <a:lstStyle/>
           <a:p>
             <a:r>
-              <a:rPr lang="en-GB"/>
-              <a:t>The primary goal was to identify and target high-value customers effectively to increase their average basket size</a:t>
-            </a:r>
-          </a:p>
-          <a:p>
-            <a:r>
-              <a:rPr lang="en-GB"/>
-              <a:t>There was a need to overcome the limitations of traditional segmentation by adopting a more predictive analytics approach</a:t>
+              <a:rPr lang="en-GB" dirty="0"/>
+              <a:t>Point1</a:t>
+            </a:r>
+          </a:p>
+          <a:p>
+            <a:r>
+              <a:rPr lang="en-GB" dirty="0"/>
+              <a:t>Point2</a:t>
             </a:r>
           </a:p>
         </p:txBody>
@@ -4240,31 +4226,12 @@
 </file>
 
 <file path=customXml/item1.xml><?xml version="1.0" encoding="utf-8"?>
-<p:properties xmlns:p="http://schemas.microsoft.com/office/2006/metadata/properties" xmlns:xsi="http://www.w3.org/2001/XMLSchema-instance" xmlns:pc="http://schemas.microsoft.com/office/infopath/2007/PartnerControls">
-  <documentManagement>
-    <SharedWithUsers xmlns="93dfb1fd-9939-48e8-b7f9-906c8dec5f83">
-      <UserInfo>
-        <DisplayName>Claudia Ciuciu</DisplayName>
-        <AccountId>784</AccountId>
-        <AccountType/>
-      </UserInfo>
-      <UserInfo>
-        <DisplayName>Annie Yim</DisplayName>
-        <AccountId>36</AccountId>
-        <AccountType/>
-      </UserInfo>
-      <UserInfo>
-        <DisplayName>Giuseppe Gagliano</DisplayName>
-        <AccountId>360</AccountId>
-        <AccountType/>
-      </UserInfo>
-    </SharedWithUsers>
-    <lcf76f155ced4ddcb4097134ff3c332f xmlns="3ed6e455-ac74-4dac-a85f-281444f13a89">
-      <Terms xmlns="http://schemas.microsoft.com/office/infopath/2007/PartnerControls"/>
-    </lcf76f155ced4ddcb4097134ff3c332f>
-    <TaxCatchAll xmlns="93dfb1fd-9939-48e8-b7f9-906c8dec5f83" xsi:nil="true"/>
-  </documentManagement>
-</p:properties>
+<?mso-contentType ?>
+<FormTemplates xmlns="http://schemas.microsoft.com/sharepoint/v3/contenttype/forms">
+  <Display>DocumentLibraryForm</Display>
+  <Edit>DocumentLibraryForm</Edit>
+  <New>DocumentLibraryForm</New>
+</FormTemplates>
 </file>
 
 <file path=customXml/item2.xml><?xml version="1.0" encoding="utf-8"?>
@@ -4523,27 +4490,37 @@
 </file>
 
 <file path=customXml/item3.xml><?xml version="1.0" encoding="utf-8"?>
-<?mso-contentType ?>
-<FormTemplates xmlns="http://schemas.microsoft.com/sharepoint/v3/contenttype/forms">
-  <Display>DocumentLibraryForm</Display>
-  <Edit>DocumentLibraryForm</Edit>
-  <New>DocumentLibraryForm</New>
-</FormTemplates>
+<p:properties xmlns:p="http://schemas.microsoft.com/office/2006/metadata/properties" xmlns:xsi="http://www.w3.org/2001/XMLSchema-instance" xmlns:pc="http://schemas.microsoft.com/office/infopath/2007/PartnerControls">
+  <documentManagement>
+    <SharedWithUsers xmlns="93dfb1fd-9939-48e8-b7f9-906c8dec5f83">
+      <UserInfo>
+        <DisplayName>Claudia Ciuciu</DisplayName>
+        <AccountId>784</AccountId>
+        <AccountType/>
+      </UserInfo>
+      <UserInfo>
+        <DisplayName>Annie Yim</DisplayName>
+        <AccountId>36</AccountId>
+        <AccountType/>
+      </UserInfo>
+      <UserInfo>
+        <DisplayName>Giuseppe Gagliano</DisplayName>
+        <AccountId>360</AccountId>
+        <AccountType/>
+      </UserInfo>
+    </SharedWithUsers>
+    <lcf76f155ced4ddcb4097134ff3c332f xmlns="3ed6e455-ac74-4dac-a85f-281444f13a89">
+      <Terms xmlns="http://schemas.microsoft.com/office/infopath/2007/PartnerControls"/>
+    </lcf76f155ced4ddcb4097134ff3c332f>
+    <TaxCatchAll xmlns="93dfb1fd-9939-48e8-b7f9-906c8dec5f83" xsi:nil="true"/>
+  </documentManagement>
+</p:properties>
 </file>
 
 <file path=customXml/itemProps1.xml><?xml version="1.0" encoding="utf-8"?>
-<ds:datastoreItem xmlns:ds="http://schemas.openxmlformats.org/officeDocument/2006/customXml" ds:itemID="{E7C53C13-48C7-4544-93BF-9003A9BB3E88}">
+<ds:datastoreItem xmlns:ds="http://schemas.openxmlformats.org/officeDocument/2006/customXml" ds:itemID="{2E225052-F2B8-49FC-A412-5D27ABF2318D}">
   <ds:schemaRefs>
-    <ds:schemaRef ds:uri="http://www.w3.org/XML/1998/namespace"/>
-    <ds:schemaRef ds:uri="http://purl.org/dc/dcmitype/"/>
-    <ds:schemaRef ds:uri="http://schemas.microsoft.com/office/infopath/2007/PartnerControls"/>
-    <ds:schemaRef ds:uri="http://purl.org/dc/elements/1.1/"/>
-    <ds:schemaRef ds:uri="93dfb1fd-9939-48e8-b7f9-906c8dec5f83"/>
-    <ds:schemaRef ds:uri="http://purl.org/dc/terms/"/>
-    <ds:schemaRef ds:uri="http://schemas.openxmlformats.org/package/2006/metadata/core-properties"/>
-    <ds:schemaRef ds:uri="http://schemas.microsoft.com/office/2006/documentManagement/types"/>
-    <ds:schemaRef ds:uri="3ed6e455-ac74-4dac-a85f-281444f13a89"/>
-    <ds:schemaRef ds:uri="http://schemas.microsoft.com/office/2006/metadata/properties"/>
+    <ds:schemaRef ds:uri="http://schemas.microsoft.com/sharepoint/v3/contenttype/forms"/>
   </ds:schemaRefs>
 </ds:datastoreItem>
 </file>
@@ -4568,9 +4545,18 @@
 </file>
 
 <file path=customXml/itemProps3.xml><?xml version="1.0" encoding="utf-8"?>
-<ds:datastoreItem xmlns:ds="http://schemas.openxmlformats.org/officeDocument/2006/customXml" ds:itemID="{2E225052-F2B8-49FC-A412-5D27ABF2318D}">
+<ds:datastoreItem xmlns:ds="http://schemas.openxmlformats.org/officeDocument/2006/customXml" ds:itemID="{E7C53C13-48C7-4544-93BF-9003A9BB3E88}">
   <ds:schemaRefs>
-    <ds:schemaRef ds:uri="http://schemas.microsoft.com/sharepoint/v3/contenttype/forms"/>
+    <ds:schemaRef ds:uri="http://www.w3.org/XML/1998/namespace"/>
+    <ds:schemaRef ds:uri="http://purl.org/dc/dcmitype/"/>
+    <ds:schemaRef ds:uri="http://schemas.microsoft.com/office/infopath/2007/PartnerControls"/>
+    <ds:schemaRef ds:uri="http://purl.org/dc/elements/1.1/"/>
+    <ds:schemaRef ds:uri="93dfb1fd-9939-48e8-b7f9-906c8dec5f83"/>
+    <ds:schemaRef ds:uri="http://purl.org/dc/terms/"/>
+    <ds:schemaRef ds:uri="http://schemas.openxmlformats.org/package/2006/metadata/core-properties"/>
+    <ds:schemaRef ds:uri="http://schemas.microsoft.com/office/2006/documentManagement/types"/>
+    <ds:schemaRef ds:uri="3ed6e455-ac74-4dac-a85f-281444f13a89"/>
+    <ds:schemaRef ds:uri="http://schemas.microsoft.com/office/2006/metadata/properties"/>
   </ds:schemaRefs>
 </ds:datastoreItem>
 </file>
